--- a/m8/diapositivos/sessao-09-m8-f09.pptx
+++ b/m8/diapositivos/sessao-09-m8-f09.pptx
@@ -1887,7 +1887,87 @@
                 <a:ea typeface="Georgia" pitchFamily="34" charset="-122"/>
                 <a:cs typeface="Georgia" pitchFamily="34" charset="-120"/>
               </a:rPr>
-              <a:t>Tira três imagens ao acaso, de um conjunto preparado pelo docente. Escreve um conto de 400–600 palavras em que as três imagens sejam necessárias à história.</a:t>
+              <a:t>Tira </a:t>
+            </a:r>
+            <a:pPr indent="0" marL="0">
+              <a:lnSpc>
+                <a:spcPct val="120000"/>
+              </a:lnSpc>
+              <a:spcAft>
+                <a:spcPts val="1000"/>
+              </a:spcAft>
+              <a:buNone/>
+            </a:pPr>
+            <a:r>
+              <a:rPr lang="en-US" sz="2300" b="1" dirty="0">
+                <a:solidFill>
+                  <a:srgbClr val="F2F0EA"/>
+                </a:solidFill>
+                <a:latin typeface="Georgia" pitchFamily="34" charset="0"/>
+                <a:ea typeface="Georgia" pitchFamily="34" charset="-122"/>
+                <a:cs typeface="Georgia" pitchFamily="34" charset="-120"/>
+              </a:rPr>
+              <a:t>três imagens ao acaso</a:t>
+            </a:r>
+            <a:pPr indent="0" marL="0">
+              <a:lnSpc>
+                <a:spcPct val="120000"/>
+              </a:lnSpc>
+              <a:spcAft>
+                <a:spcPts val="1000"/>
+              </a:spcAft>
+              <a:buNone/>
+            </a:pPr>
+            <a:r>
+              <a:rPr lang="en-US" sz="2300" dirty="0">
+                <a:solidFill>
+                  <a:srgbClr val="F2F0EA"/>
+                </a:solidFill>
+                <a:latin typeface="Georgia" pitchFamily="34" charset="0"/>
+                <a:ea typeface="Georgia" pitchFamily="34" charset="-122"/>
+                <a:cs typeface="Georgia" pitchFamily="34" charset="-120"/>
+              </a:rPr>
+              <a:t>, de um conjunto preparado pelo docente. Escreve um </a:t>
+            </a:r>
+            <a:pPr indent="0" marL="0">
+              <a:lnSpc>
+                <a:spcPct val="120000"/>
+              </a:lnSpc>
+              <a:spcAft>
+                <a:spcPts val="1000"/>
+              </a:spcAft>
+              <a:buNone/>
+            </a:pPr>
+            <a:r>
+              <a:rPr lang="en-US" sz="2300" b="1" dirty="0">
+                <a:solidFill>
+                  <a:srgbClr val="F2F0EA"/>
+                </a:solidFill>
+                <a:latin typeface="Georgia" pitchFamily="34" charset="0"/>
+                <a:ea typeface="Georgia" pitchFamily="34" charset="-122"/>
+                <a:cs typeface="Georgia" pitchFamily="34" charset="-120"/>
+              </a:rPr>
+              <a:t>conto</a:t>
+            </a:r>
+            <a:pPr indent="0" marL="0">
+              <a:lnSpc>
+                <a:spcPct val="120000"/>
+              </a:lnSpc>
+              <a:spcAft>
+                <a:spcPts val="1000"/>
+              </a:spcAft>
+              <a:buNone/>
+            </a:pPr>
+            <a:r>
+              <a:rPr lang="en-US" sz="2300" dirty="0">
+                <a:solidFill>
+                  <a:srgbClr val="F2F0EA"/>
+                </a:solidFill>
+                <a:latin typeface="Georgia" pitchFamily="34" charset="0"/>
+                <a:ea typeface="Georgia" pitchFamily="34" charset="-122"/>
+                <a:cs typeface="Georgia" pitchFamily="34" charset="-120"/>
+              </a:rPr>
+              <a:t> de 400–600 palavras em que as três imagens sejam necessárias à história.</a:t>
             </a:r>
             <a:endParaRPr lang="en-US" sz="2300" dirty="0"/>
           </a:p>
